--- a/samples/animations/behavior-motion.pptx
+++ b/samples/animations/behavior-motion.pptx
@@ -1987,7 +1987,7 @@
                 <a:ea typeface="Arial" pitchFamily="34" charset="-122"/>
                 <a:cs typeface="Arial" pitchFamily="34" charset="-120"/>
               </a:rPr>
-              <a:t>presetID=2  ·  presetClass=exit    </a:t>
+              <a:t>presetID=2  ·  presetClass=exit    （网页侧为近似）</a:t>
             </a:r>
             <a:endParaRPr lang="en-US" sz="1400" dirty="0"/>
           </a:p>
@@ -3867,7 +3867,7 @@
                 <a:ea typeface="Arial" pitchFamily="34" charset="-122"/>
                 <a:cs typeface="Arial" pitchFamily="34" charset="-120"/>
               </a:rPr>
-              <a:t>presetID=2  ·  presetClass=entr    </a:t>
+              <a:t>presetID=2  ·  presetClass=entr    （网页侧为近似）</a:t>
             </a:r>
             <a:endParaRPr lang="en-US" sz="1400" dirty="0"/>
           </a:p>
